--- a/review-3/Review-3-Presentation.pptx
+++ b/review-3/Review-3-Presentation.pptx
@@ -1626,7 +1626,7 @@
                 <a:ea typeface="Calibri" pitchFamily="34" charset="-122"/>
                 <a:cs typeface="Calibri" pitchFamily="34" charset="-120"/>
               </a:rPr>
-              <a:t>[ Your Name ]</a:t>
+              <a:t>BANGLA DEEKSHAN RAJ</a:t>
             </a:r>
             <a:endParaRPr lang="en-US" sz="1300" dirty="0"/>
           </a:p>
@@ -1646,7 +1646,7 @@
                 <a:ea typeface="Calibri" pitchFamily="34" charset="-122"/>
                 <a:cs typeface="Calibri" pitchFamily="34" charset="-120"/>
               </a:rPr>
-              <a:t>[ Roll No. / USN ]  ·  [ Class / Section ]</a:t>
+              <a:t>Roll No: 25WU0102037  ·  Class: AIML RHINOS</a:t>
             </a:r>
             <a:endParaRPr lang="en-US" sz="1300" dirty="0"/>
           </a:p>
@@ -1666,7 +1666,7 @@
                 <a:ea typeface="Calibri" pitchFamily="34" charset="-122"/>
                 <a:cs typeface="Calibri" pitchFamily="34" charset="-120"/>
               </a:rPr>
-              <a:t>[ College Name ] — Week 16 Review</a:t>
+              <a:t>WOXSEN UNIVERSITY — Week 16 Review</a:t>
             </a:r>
             <a:endParaRPr lang="en-US" sz="1300" dirty="0"/>
           </a:p>
